--- a/dist/weeks-1학기/서비스디자인_1학기_04주차_리서치합성.pptx
+++ b/dist/weeks-1학기/서비스디자인_1학기_04주차_리서치합성.pptx
@@ -12693,7 +12693,7 @@
               <a:buNone/>
             </a:pPr>
             <a:r>
-              <a:rPr lang="en-US" sz="1150" dirty="0">
+              <a:rPr lang="en-US" sz="1050" dirty="0">
                 <a:solidFill>
                   <a:srgbClr val="6E6E6E"/>
                 </a:solidFill>
@@ -12703,7 +12703,7 @@
               </a:rPr>
               <a:t>카드 60장을 전지 위에 전부 펼칩니다. 읽으면서 분류하지 말고, 일단 눈으로 한 번 훑습니다.</a:t>
             </a:r>
-            <a:endParaRPr lang="en-US" sz="1150" dirty="0"/>
+            <a:endParaRPr lang="en-US" sz="1050" dirty="0"/>
           </a:p>
         </p:txBody>
       </p:sp>
@@ -12866,7 +12866,7 @@
               <a:buNone/>
             </a:pPr>
             <a:r>
-              <a:rPr lang="en-US" sz="1150" dirty="0">
+              <a:rPr lang="en-US" sz="1050" dirty="0">
                 <a:solidFill>
                   <a:srgbClr val="6E6E6E"/>
                 </a:solidFill>
@@ -12876,7 +12876,7 @@
               </a:rPr>
               <a:t>"이건 저것과 비슷한데" 싶은 것을 붙여 나갑니다. 이유는 나중에 붙입니다. 3~7장짜리 묶음이 적당합니다.</a:t>
             </a:r>
-            <a:endParaRPr lang="en-US" sz="1150" dirty="0"/>
+            <a:endParaRPr lang="en-US" sz="1050" dirty="0"/>
           </a:p>
         </p:txBody>
       </p:sp>
@@ -13039,7 +13039,7 @@
               <a:buNone/>
             </a:pPr>
             <a:r>
-              <a:rPr lang="en-US" sz="1150" dirty="0">
+              <a:rPr lang="en-US" sz="1050" dirty="0">
                 <a:solidFill>
                   <a:srgbClr val="6E6E6E"/>
                 </a:solidFill>
@@ -13049,7 +13049,7 @@
               </a:rPr>
               <a:t>묶음마다 이름을 답니다. '대기' 같은 명사가 아니라 '얼마나 남았는지 모른다' 같은 문장으로 답니다.</a:t>
             </a:r>
-            <a:endParaRPr lang="en-US" sz="1150" dirty="0"/>
+            <a:endParaRPr lang="en-US" sz="1050" dirty="0"/>
           </a:p>
         </p:txBody>
       </p:sp>
@@ -13212,7 +13212,7 @@
               <a:buNone/>
             </a:pPr>
             <a:r>
-              <a:rPr lang="en-US" sz="1150" dirty="0">
+              <a:rPr lang="en-US" sz="1050" dirty="0">
                 <a:solidFill>
                   <a:srgbClr val="B8B8B8"/>
                 </a:solidFill>
@@ -13222,7 +13222,7 @@
               </a:rPr>
               <a:t>이름 붙은 묶음끼리 다시 묶습니다. 2~3개 큰 덩어리가 나오면 그것이 여러분 프로젝트의 뼈대입니다.</a:t>
             </a:r>
-            <a:endParaRPr lang="en-US" sz="1150" dirty="0"/>
+            <a:endParaRPr lang="en-US" sz="1050" dirty="0"/>
           </a:p>
         </p:txBody>
       </p:sp>
@@ -15632,7 +15632,7 @@
               <a:buNone/>
             </a:pPr>
             <a:r>
-              <a:rPr lang="en-US" sz="1150" dirty="0">
+              <a:rPr lang="en-US" sz="1050" dirty="0">
                 <a:solidFill>
                   <a:srgbClr val="6E6E6E"/>
                 </a:solidFill>
@@ -15642,7 +15642,7 @@
               </a:rPr>
               <a:t>이 사람이 어떤 상황에 놓여 있는가. 직업 · 동거 형태 · 하루 리듬 중 문제와 관련된 것만.</a:t>
             </a:r>
-            <a:endParaRPr lang="en-US" sz="1150" dirty="0"/>
+            <a:endParaRPr lang="en-US" sz="1050" dirty="0"/>
           </a:p>
         </p:txBody>
       </p:sp>
@@ -15805,7 +15805,7 @@
               <a:buNone/>
             </a:pPr>
             <a:r>
-              <a:rPr lang="en-US" sz="1150" dirty="0">
+              <a:rPr lang="en-US" sz="1050" dirty="0">
                 <a:solidFill>
                   <a:srgbClr val="6E6E6E"/>
                 </a:solidFill>
@@ -15815,7 +15815,7 @@
               </a:rPr>
               <a:t>무엇을 하려고 하는가. 서비스를 쓰는 것이 목적이 아니라, 그 뒤에 이루려는 일이 목표입니다.</a:t>
             </a:r>
-            <a:endParaRPr lang="en-US" sz="1150" dirty="0"/>
+            <a:endParaRPr lang="en-US" sz="1050" dirty="0"/>
           </a:p>
         </p:txBody>
       </p:sp>
@@ -15978,7 +15978,7 @@
               <a:buNone/>
             </a:pPr>
             <a:r>
-              <a:rPr lang="en-US" sz="1150" dirty="0">
+              <a:rPr lang="en-US" sz="1050" dirty="0">
                 <a:solidFill>
                   <a:srgbClr val="6E6E6E"/>
                 </a:solidFill>
@@ -15988,7 +15988,7 @@
               </a:rPr>
               <a:t>실제로 어떻게 하는가. 3주차 인터뷰의 '행동 질문'에서 나온 답이 여기 들어갑니다.</a:t>
             </a:r>
-            <a:endParaRPr lang="en-US" sz="1150" dirty="0"/>
+            <a:endParaRPr lang="en-US" sz="1050" dirty="0"/>
           </a:p>
         </p:txBody>
       </p:sp>
@@ -16151,7 +16151,7 @@
               <a:buNone/>
             </a:pPr>
             <a:r>
-              <a:rPr lang="en-US" sz="1150" dirty="0">
+              <a:rPr lang="en-US" sz="1050" dirty="0">
                 <a:solidFill>
                   <a:srgbClr val="6E6E6E"/>
                 </a:solidFill>
@@ -16161,7 +16161,7 @@
               </a:rPr>
               <a:t>무엇이 막고 있는가. 어피니티 묶음 이름이 대부분 여기로 옮겨집니다.</a:t>
             </a:r>
-            <a:endParaRPr lang="en-US" sz="1150" dirty="0"/>
+            <a:endParaRPr lang="en-US" sz="1050" dirty="0"/>
           </a:p>
         </p:txBody>
       </p:sp>

--- a/dist/weeks-1학기/서비스디자인_1학기_04주차_리서치합성.pptx
+++ b/dist/weeks-1학기/서비스디자인_1학기_04주차_리서치합성.pptx
@@ -13702,6 +13702,95 @@
             <a:avLst/>
           </a:prstGeom>
           <a:solidFill>
+            <a:srgbClr val="FFFFFF"/>
+          </a:solidFill>
+          <a:ln w="12700">
+            <a:solidFill>
+              <a:srgbClr val="111111"/>
+            </a:solidFill>
+            <a:prstDash val="solid"/>
+          </a:ln>
+        </p:spPr>
+      </p:sp>
+      <p:sp>
+        <p:nvSpPr>
+          <p:cNvPr id="10" name="Shape 8"/>
+          <p:cNvSpPr/>
+          <p:nvPr/>
+        </p:nvSpPr>
+        <p:spPr>
+          <a:xfrm>
+            <a:off x="640080" y="1627632"/>
+            <a:ext cx="5254600" cy="64008"/>
+          </a:xfrm>
+          <a:prstGeom prst="rect">
+            <a:avLst/>
+          </a:prstGeom>
+          <a:solidFill>
+            <a:srgbClr val="111111"/>
+          </a:solidFill>
+          <a:ln w="12700">
+            <a:solidFill>
+              <a:srgbClr val="111111"/>
+            </a:solidFill>
+            <a:prstDash val="solid"/>
+          </a:ln>
+        </p:spPr>
+      </p:sp>
+      <p:sp>
+        <p:nvSpPr>
+          <p:cNvPr id="11" name="Text 9"/>
+          <p:cNvSpPr/>
+          <p:nvPr/>
+        </p:nvSpPr>
+        <p:spPr>
+          <a:xfrm>
+            <a:off x="1042416" y="1901952"/>
+            <a:ext cx="4449928" cy="365760"/>
+          </a:xfrm>
+          <a:prstGeom prst="rect">
+            <a:avLst/>
+          </a:prstGeom>
+          <a:noFill/>
+          <a:ln/>
+        </p:spPr>
+        <p:txBody>
+          <a:bodyPr wrap="square" lIns="0" tIns="0" rIns="0" bIns="0" rtlCol="0" anchor="ctr"/>
+          <a:lstStyle/>
+          <a:p>
+            <a:pPr indent="0" marL="0">
+              <a:buNone/>
+            </a:pPr>
+            <a:r>
+              <a:rPr lang="en-US" sz="1700" dirty="0">
+                <a:solidFill>
+                  <a:srgbClr val="111111"/>
+                </a:solidFill>
+                <a:latin typeface="Pretendard SemiBold" pitchFamily="34" charset="0"/>
+                <a:ea typeface="Pretendard SemiBold" pitchFamily="34" charset="-122"/>
+                <a:cs typeface="Pretendard SemiBold" pitchFamily="34" charset="-120"/>
+              </a:rPr>
+              <a:t>쓸모 있는 묶음</a:t>
+            </a:r>
+            <a:endParaRPr lang="en-US" sz="1700" dirty="0"/>
+          </a:p>
+        </p:txBody>
+      </p:sp>
+      <p:sp>
+        <p:nvSpPr>
+          <p:cNvPr id="12" name="Shape 10"/>
+          <p:cNvSpPr/>
+          <p:nvPr/>
+        </p:nvSpPr>
+        <p:spPr>
+          <a:xfrm>
+            <a:off x="6297016" y="1627632"/>
+            <a:ext cx="5254600" cy="3419856"/>
+          </a:xfrm>
+          <a:prstGeom prst="rect">
+            <a:avLst/>
+          </a:prstGeom>
+          <a:solidFill>
             <a:srgbClr val="F2F2F2"/>
           </a:solidFill>
           <a:ln w="12700">
@@ -13714,13 +13803,13 @@
       </p:sp>
       <p:sp>
         <p:nvSpPr>
-          <p:cNvPr id="10" name="Text 8"/>
-          <p:cNvSpPr/>
-          <p:nvPr/>
-        </p:nvSpPr>
-        <p:spPr>
-          <a:xfrm>
-            <a:off x="1042416" y="1901952"/>
+          <p:cNvPr id="13" name="Text 11"/>
+          <p:cNvSpPr/>
+          <p:nvPr/>
+        </p:nvSpPr>
+        <p:spPr>
+          <a:xfrm>
+            <a:off x="6699352" y="1901952"/>
             <a:ext cx="4449928" cy="365760"/>
           </a:xfrm>
           <a:prstGeom prst="rect">
@@ -13739,13 +13828,13 @@
             <a:r>
               <a:rPr lang="en-US" sz="1700" dirty="0">
                 <a:solidFill>
-                  <a:srgbClr val="111111"/>
+                  <a:srgbClr val="9B9B9B"/>
                 </a:solidFill>
                 <a:latin typeface="Pretendard SemiBold" pitchFamily="34" charset="0"/>
                 <a:ea typeface="Pretendard SemiBold" pitchFamily="34" charset="-122"/>
                 <a:cs typeface="Pretendard SemiBold" pitchFamily="34" charset="-120"/>
               </a:rPr>
-              <a:t>쓸모 있는 묶음</a:t>
+              <a:t>아무것도 남지 않는 묶음</a:t>
             </a:r>
             <a:endParaRPr lang="en-US" sz="1700" dirty="0"/>
           </a:p>
@@ -13753,71 +13842,7 @@
       </p:sp>
       <p:sp>
         <p:nvSpPr>
-          <p:cNvPr id="11" name="Shape 9"/>
-          <p:cNvSpPr/>
-          <p:nvPr/>
-        </p:nvSpPr>
-        <p:spPr>
-          <a:xfrm>
-            <a:off x="6297016" y="1627632"/>
-            <a:ext cx="5254600" cy="3419856"/>
-          </a:xfrm>
-          <a:prstGeom prst="rect">
-            <a:avLst/>
-          </a:prstGeom>
-          <a:solidFill>
-            <a:srgbClr val="FFFFFF"/>
-          </a:solidFill>
-          <a:ln w="12700">
-            <a:solidFill>
-              <a:srgbClr val="DCDCDC"/>
-            </a:solidFill>
-            <a:prstDash val="solid"/>
-          </a:ln>
-        </p:spPr>
-      </p:sp>
-      <p:sp>
-        <p:nvSpPr>
-          <p:cNvPr id="12" name="Text 10"/>
-          <p:cNvSpPr/>
-          <p:nvPr/>
-        </p:nvSpPr>
-        <p:spPr>
-          <a:xfrm>
-            <a:off x="6699352" y="1901952"/>
-            <a:ext cx="4449928" cy="365760"/>
-          </a:xfrm>
-          <a:prstGeom prst="rect">
-            <a:avLst/>
-          </a:prstGeom>
-          <a:noFill/>
-          <a:ln/>
-        </p:spPr>
-        <p:txBody>
-          <a:bodyPr wrap="square" lIns="0" tIns="0" rIns="0" bIns="0" rtlCol="0" anchor="ctr"/>
-          <a:lstStyle/>
-          <a:p>
-            <a:pPr indent="0" marL="0">
-              <a:buNone/>
-            </a:pPr>
-            <a:r>
-              <a:rPr lang="en-US" sz="1700" dirty="0">
-                <a:solidFill>
-                  <a:srgbClr val="9B9B9B"/>
-                </a:solidFill>
-                <a:latin typeface="Pretendard SemiBold" pitchFamily="34" charset="0"/>
-                <a:ea typeface="Pretendard SemiBold" pitchFamily="34" charset="-122"/>
-                <a:cs typeface="Pretendard SemiBold" pitchFamily="34" charset="-120"/>
-              </a:rPr>
-              <a:t>아무것도 남지 않는 묶음</a:t>
-            </a:r>
-            <a:endParaRPr lang="en-US" sz="1700" dirty="0"/>
-          </a:p>
-        </p:txBody>
-      </p:sp>
-      <p:sp>
-        <p:nvSpPr>
-          <p:cNvPr id="13" name="Text 11"/>
+          <p:cNvPr id="14" name="Text 12"/>
           <p:cNvSpPr/>
           <p:nvPr/>
         </p:nvSpPr>
@@ -13856,7 +13881,7 @@
       </p:sp>
       <p:sp>
         <p:nvSpPr>
-          <p:cNvPr id="14" name="Text 12"/>
+          <p:cNvPr id="15" name="Text 13"/>
           <p:cNvSpPr/>
           <p:nvPr/>
         </p:nvSpPr>
@@ -13882,7 +13907,7 @@
               <a:buNone/>
             </a:pPr>
             <a:r>
-              <a:rPr lang="en-US" sz="1150" dirty="0">
+              <a:rPr lang="en-US" sz="1150" b="1" dirty="0">
                 <a:solidFill>
                   <a:srgbClr val="1F1F1F"/>
                 </a:solidFill>
@@ -13898,7 +13923,7 @@
       </p:sp>
       <p:sp>
         <p:nvSpPr>
-          <p:cNvPr id="15" name="Text 13"/>
+          <p:cNvPr id="16" name="Text 14"/>
           <p:cNvSpPr/>
           <p:nvPr/>
         </p:nvSpPr>
@@ -13937,7 +13962,7 @@
       </p:sp>
       <p:sp>
         <p:nvSpPr>
-          <p:cNvPr id="16" name="Text 14"/>
+          <p:cNvPr id="17" name="Text 15"/>
           <p:cNvSpPr/>
           <p:nvPr/>
         </p:nvSpPr>
@@ -13979,7 +14004,7 @@
       </p:sp>
       <p:sp>
         <p:nvSpPr>
-          <p:cNvPr id="17" name="Shape 15"/>
+          <p:cNvPr id="18" name="Shape 16"/>
           <p:cNvSpPr/>
           <p:nvPr/>
         </p:nvSpPr>
@@ -14004,7 +14029,7 @@
       </p:sp>
       <p:sp>
         <p:nvSpPr>
-          <p:cNvPr id="18" name="Shape 16"/>
+          <p:cNvPr id="19" name="Shape 17"/>
           <p:cNvSpPr/>
           <p:nvPr/>
         </p:nvSpPr>
@@ -14029,7 +14054,7 @@
       </p:sp>
       <p:sp>
         <p:nvSpPr>
-          <p:cNvPr id="19" name="Text 17"/>
+          <p:cNvPr id="20" name="Text 18"/>
           <p:cNvSpPr/>
           <p:nvPr/>
         </p:nvSpPr>
@@ -14068,7 +14093,7 @@
       </p:sp>
       <p:sp>
         <p:nvSpPr>
-          <p:cNvPr id="20" name="Text 18"/>
+          <p:cNvPr id="21" name="Text 19"/>
           <p:cNvSpPr/>
           <p:nvPr/>
         </p:nvSpPr>
@@ -14094,7 +14119,7 @@
               <a:buNone/>
             </a:pPr>
             <a:r>
-              <a:rPr lang="en-US" sz="1150" dirty="0">
+              <a:rPr lang="en-US" sz="1150" b="1" dirty="0">
                 <a:solidFill>
                   <a:srgbClr val="1F1F1F"/>
                 </a:solidFill>
@@ -14110,7 +14135,7 @@
       </p:sp>
       <p:sp>
         <p:nvSpPr>
-          <p:cNvPr id="21" name="Text 19"/>
+          <p:cNvPr id="22" name="Text 20"/>
           <p:cNvSpPr/>
           <p:nvPr/>
         </p:nvSpPr>
@@ -14149,7 +14174,7 @@
       </p:sp>
       <p:sp>
         <p:nvSpPr>
-          <p:cNvPr id="22" name="Text 20"/>
+          <p:cNvPr id="23" name="Text 21"/>
           <p:cNvSpPr/>
           <p:nvPr/>
         </p:nvSpPr>
@@ -14191,7 +14216,7 @@
       </p:sp>
       <p:sp>
         <p:nvSpPr>
-          <p:cNvPr id="23" name="Shape 21"/>
+          <p:cNvPr id="24" name="Shape 22"/>
           <p:cNvSpPr/>
           <p:nvPr/>
         </p:nvSpPr>
@@ -14216,7 +14241,7 @@
       </p:sp>
       <p:sp>
         <p:nvSpPr>
-          <p:cNvPr id="24" name="Shape 22"/>
+          <p:cNvPr id="25" name="Shape 23"/>
           <p:cNvSpPr/>
           <p:nvPr/>
         </p:nvSpPr>
@@ -14241,7 +14266,7 @@
       </p:sp>
       <p:sp>
         <p:nvSpPr>
-          <p:cNvPr id="25" name="Text 23"/>
+          <p:cNvPr id="26" name="Text 24"/>
           <p:cNvSpPr/>
           <p:nvPr/>
         </p:nvSpPr>
@@ -14280,7 +14305,7 @@
       </p:sp>
       <p:sp>
         <p:nvSpPr>
-          <p:cNvPr id="26" name="Text 24"/>
+          <p:cNvPr id="27" name="Text 25"/>
           <p:cNvSpPr/>
           <p:nvPr/>
         </p:nvSpPr>
@@ -14306,7 +14331,7 @@
               <a:buNone/>
             </a:pPr>
             <a:r>
-              <a:rPr lang="en-US" sz="1150" dirty="0">
+              <a:rPr lang="en-US" sz="1150" b="1" dirty="0">
                 <a:solidFill>
                   <a:srgbClr val="1F1F1F"/>
                 </a:solidFill>
@@ -14322,7 +14347,7 @@
       </p:sp>
       <p:sp>
         <p:nvSpPr>
-          <p:cNvPr id="27" name="Text 25"/>
+          <p:cNvPr id="28" name="Text 26"/>
           <p:cNvSpPr/>
           <p:nvPr/>
         </p:nvSpPr>
@@ -14361,7 +14386,7 @@
       </p:sp>
       <p:sp>
         <p:nvSpPr>
-          <p:cNvPr id="28" name="Text 26"/>
+          <p:cNvPr id="29" name="Text 27"/>
           <p:cNvSpPr/>
           <p:nvPr/>
         </p:nvSpPr>
@@ -14403,7 +14428,7 @@
       </p:sp>
       <p:sp>
         <p:nvSpPr>
-          <p:cNvPr id="29" name="Shape 27"/>
+          <p:cNvPr id="30" name="Shape 28"/>
           <p:cNvSpPr/>
           <p:nvPr/>
         </p:nvSpPr>
@@ -14428,7 +14453,7 @@
       </p:sp>
       <p:sp>
         <p:nvSpPr>
-          <p:cNvPr id="30" name="Shape 28"/>
+          <p:cNvPr id="31" name="Shape 29"/>
           <p:cNvSpPr/>
           <p:nvPr/>
         </p:nvSpPr>
@@ -14453,7 +14478,7 @@
       </p:sp>
       <p:sp>
         <p:nvSpPr>
-          <p:cNvPr id="31" name="Text 29"/>
+          <p:cNvPr id="32" name="Text 30"/>
           <p:cNvSpPr/>
           <p:nvPr/>
         </p:nvSpPr>
@@ -14492,7 +14517,7 @@
       </p:sp>
       <p:sp>
         <p:nvSpPr>
-          <p:cNvPr id="32" name="Text 30"/>
+          <p:cNvPr id="33" name="Text 31"/>
           <p:cNvSpPr/>
           <p:nvPr/>
         </p:nvSpPr>
@@ -14518,7 +14543,7 @@
               <a:buNone/>
             </a:pPr>
             <a:r>
-              <a:rPr lang="en-US" sz="1150" dirty="0">
+              <a:rPr lang="en-US" sz="1150" b="1" dirty="0">
                 <a:solidFill>
                   <a:srgbClr val="1F1F1F"/>
                 </a:solidFill>
@@ -14534,7 +14559,7 @@
       </p:sp>
       <p:sp>
         <p:nvSpPr>
-          <p:cNvPr id="33" name="Text 31"/>
+          <p:cNvPr id="34" name="Text 32"/>
           <p:cNvSpPr/>
           <p:nvPr/>
         </p:nvSpPr>
@@ -14573,7 +14598,7 @@
       </p:sp>
       <p:sp>
         <p:nvSpPr>
-          <p:cNvPr id="34" name="Text 32"/>
+          <p:cNvPr id="35" name="Text 33"/>
           <p:cNvSpPr/>
           <p:nvPr/>
         </p:nvSpPr>
@@ -14615,7 +14640,7 @@
       </p:sp>
       <p:sp>
         <p:nvSpPr>
-          <p:cNvPr id="35" name="Shape 33"/>
+          <p:cNvPr id="36" name="Shape 34"/>
           <p:cNvSpPr/>
           <p:nvPr/>
         </p:nvSpPr>
@@ -14640,7 +14665,7 @@
       </p:sp>
       <p:sp>
         <p:nvSpPr>
-          <p:cNvPr id="36" name="Text 34"/>
+          <p:cNvPr id="37" name="Text 35"/>
           <p:cNvSpPr/>
           <p:nvPr/>
         </p:nvSpPr>
@@ -14679,7 +14704,7 @@
       </p:sp>
       <p:sp>
         <p:nvSpPr>
-          <p:cNvPr id="37" name="Text 35"/>
+          <p:cNvPr id="38" name="Text 36"/>
           <p:cNvSpPr/>
           <p:nvPr/>
         </p:nvSpPr>
@@ -16602,6 +16627,95 @@
             <a:avLst/>
           </a:prstGeom>
           <a:solidFill>
+            <a:srgbClr val="FFFFFF"/>
+          </a:solidFill>
+          <a:ln w="12700">
+            <a:solidFill>
+              <a:srgbClr val="111111"/>
+            </a:solidFill>
+            <a:prstDash val="solid"/>
+          </a:ln>
+        </p:spPr>
+      </p:sp>
+      <p:sp>
+        <p:nvSpPr>
+          <p:cNvPr id="9" name="Shape 7"/>
+          <p:cNvSpPr/>
+          <p:nvPr/>
+        </p:nvSpPr>
+        <p:spPr>
+          <a:xfrm>
+            <a:off x="640080" y="1481328"/>
+            <a:ext cx="5254600" cy="64008"/>
+          </a:xfrm>
+          <a:prstGeom prst="rect">
+            <a:avLst/>
+          </a:prstGeom>
+          <a:solidFill>
+            <a:srgbClr val="111111"/>
+          </a:solidFill>
+          <a:ln w="12700">
+            <a:solidFill>
+              <a:srgbClr val="111111"/>
+            </a:solidFill>
+            <a:prstDash val="solid"/>
+          </a:ln>
+        </p:spPr>
+      </p:sp>
+      <p:sp>
+        <p:nvSpPr>
+          <p:cNvPr id="10" name="Text 8"/>
+          <p:cNvSpPr/>
+          <p:nvPr/>
+        </p:nvSpPr>
+        <p:spPr>
+          <a:xfrm>
+            <a:off x="1042416" y="1755648"/>
+            <a:ext cx="4449928" cy="365760"/>
+          </a:xfrm>
+          <a:prstGeom prst="rect">
+            <a:avLst/>
+          </a:prstGeom>
+          <a:noFill/>
+          <a:ln/>
+        </p:spPr>
+        <p:txBody>
+          <a:bodyPr wrap="square" lIns="0" tIns="0" rIns="0" bIns="0" rtlCol="0" anchor="ctr"/>
+          <a:lstStyle/>
+          <a:p>
+            <a:pPr indent="0" marL="0">
+              <a:buNone/>
+            </a:pPr>
+            <a:r>
+              <a:rPr lang="en-US" sz="1700" dirty="0">
+                <a:solidFill>
+                  <a:srgbClr val="111111"/>
+                </a:solidFill>
+                <a:latin typeface="Pretendard SemiBold" pitchFamily="34" charset="0"/>
+                <a:ea typeface="Pretendard SemiBold" pitchFamily="34" charset="-122"/>
+                <a:cs typeface="Pretendard SemiBold" pitchFamily="34" charset="-120"/>
+              </a:rPr>
+              <a:t>작업 도구</a:t>
+            </a:r>
+            <a:endParaRPr lang="en-US" sz="1700" dirty="0"/>
+          </a:p>
+        </p:txBody>
+      </p:sp>
+      <p:sp>
+        <p:nvSpPr>
+          <p:cNvPr id="11" name="Shape 9"/>
+          <p:cNvSpPr/>
+          <p:nvPr/>
+        </p:nvSpPr>
+        <p:spPr>
+          <a:xfrm>
+            <a:off x="6297016" y="1481328"/>
+            <a:ext cx="5254600" cy="3419856"/>
+          </a:xfrm>
+          <a:prstGeom prst="rect">
+            <a:avLst/>
+          </a:prstGeom>
+          <a:solidFill>
             <a:srgbClr val="F2F2F2"/>
           </a:solidFill>
           <a:ln w="12700">
@@ -16614,13 +16728,13 @@
       </p:sp>
       <p:sp>
         <p:nvSpPr>
-          <p:cNvPr id="9" name="Text 7"/>
-          <p:cNvSpPr/>
-          <p:nvPr/>
-        </p:nvSpPr>
-        <p:spPr>
-          <a:xfrm>
-            <a:off x="1042416" y="1755648"/>
+          <p:cNvPr id="12" name="Text 10"/>
+          <p:cNvSpPr/>
+          <p:nvPr/>
+        </p:nvSpPr>
+        <p:spPr>
+          <a:xfrm>
+            <a:off x="6699352" y="1755648"/>
             <a:ext cx="4449928" cy="365760"/>
           </a:xfrm>
           <a:prstGeom prst="rect">
@@ -16639,13 +16753,13 @@
             <a:r>
               <a:rPr lang="en-US" sz="1700" dirty="0">
                 <a:solidFill>
-                  <a:srgbClr val="111111"/>
+                  <a:srgbClr val="9B9B9B"/>
                 </a:solidFill>
                 <a:latin typeface="Pretendard SemiBold" pitchFamily="34" charset="0"/>
                 <a:ea typeface="Pretendard SemiBold" pitchFamily="34" charset="-122"/>
                 <a:cs typeface="Pretendard SemiBold" pitchFamily="34" charset="-120"/>
               </a:rPr>
-              <a:t>작업 도구</a:t>
+              <a:t>장식</a:t>
             </a:r>
             <a:endParaRPr lang="en-US" sz="1700" dirty="0"/>
           </a:p>
@@ -16653,71 +16767,7 @@
       </p:sp>
       <p:sp>
         <p:nvSpPr>
-          <p:cNvPr id="10" name="Shape 8"/>
-          <p:cNvSpPr/>
-          <p:nvPr/>
-        </p:nvSpPr>
-        <p:spPr>
-          <a:xfrm>
-            <a:off x="6297016" y="1481328"/>
-            <a:ext cx="5254600" cy="3419856"/>
-          </a:xfrm>
-          <a:prstGeom prst="rect">
-            <a:avLst/>
-          </a:prstGeom>
-          <a:solidFill>
-            <a:srgbClr val="FFFFFF"/>
-          </a:solidFill>
-          <a:ln w="12700">
-            <a:solidFill>
-              <a:srgbClr val="DCDCDC"/>
-            </a:solidFill>
-            <a:prstDash val="solid"/>
-          </a:ln>
-        </p:spPr>
-      </p:sp>
-      <p:sp>
-        <p:nvSpPr>
-          <p:cNvPr id="11" name="Text 9"/>
-          <p:cNvSpPr/>
-          <p:nvPr/>
-        </p:nvSpPr>
-        <p:spPr>
-          <a:xfrm>
-            <a:off x="6699352" y="1755648"/>
-            <a:ext cx="4449928" cy="365760"/>
-          </a:xfrm>
-          <a:prstGeom prst="rect">
-            <a:avLst/>
-          </a:prstGeom>
-          <a:noFill/>
-          <a:ln/>
-        </p:spPr>
-        <p:txBody>
-          <a:bodyPr wrap="square" lIns="0" tIns="0" rIns="0" bIns="0" rtlCol="0" anchor="ctr"/>
-          <a:lstStyle/>
-          <a:p>
-            <a:pPr indent="0" marL="0">
-              <a:buNone/>
-            </a:pPr>
-            <a:r>
-              <a:rPr lang="en-US" sz="1700" dirty="0">
-                <a:solidFill>
-                  <a:srgbClr val="9B9B9B"/>
-                </a:solidFill>
-                <a:latin typeface="Pretendard SemiBold" pitchFamily="34" charset="0"/>
-                <a:ea typeface="Pretendard SemiBold" pitchFamily="34" charset="-122"/>
-                <a:cs typeface="Pretendard SemiBold" pitchFamily="34" charset="-120"/>
-              </a:rPr>
-              <a:t>장식</a:t>
-            </a:r>
-            <a:endParaRPr lang="en-US" sz="1700" dirty="0"/>
-          </a:p>
-        </p:txBody>
-      </p:sp>
-      <p:sp>
-        <p:nvSpPr>
-          <p:cNvPr id="12" name="Text 10"/>
+          <p:cNvPr id="13" name="Text 11"/>
           <p:cNvSpPr/>
           <p:nvPr/>
         </p:nvSpPr>
@@ -16756,7 +16806,7 @@
       </p:sp>
       <p:sp>
         <p:nvSpPr>
-          <p:cNvPr id="13" name="Text 11"/>
+          <p:cNvPr id="14" name="Text 12"/>
           <p:cNvSpPr/>
           <p:nvPr/>
         </p:nvSpPr>
@@ -16782,7 +16832,7 @@
               <a:buNone/>
             </a:pPr>
             <a:r>
-              <a:rPr lang="en-US" sz="1150" dirty="0">
+              <a:rPr lang="en-US" sz="1150" b="1" dirty="0">
                 <a:solidFill>
                   <a:srgbClr val="1F1F1F"/>
                 </a:solidFill>
@@ -16798,7 +16848,7 @@
       </p:sp>
       <p:sp>
         <p:nvSpPr>
-          <p:cNvPr id="14" name="Text 12"/>
+          <p:cNvPr id="15" name="Text 13"/>
           <p:cNvSpPr/>
           <p:nvPr/>
         </p:nvSpPr>
@@ -16837,7 +16887,7 @@
       </p:sp>
       <p:sp>
         <p:nvSpPr>
-          <p:cNvPr id="15" name="Text 13"/>
+          <p:cNvPr id="16" name="Text 14"/>
           <p:cNvSpPr/>
           <p:nvPr/>
         </p:nvSpPr>
@@ -16879,7 +16929,7 @@
       </p:sp>
       <p:sp>
         <p:nvSpPr>
-          <p:cNvPr id="16" name="Shape 14"/>
+          <p:cNvPr id="17" name="Shape 15"/>
           <p:cNvSpPr/>
           <p:nvPr/>
         </p:nvSpPr>
@@ -16904,7 +16954,7 @@
       </p:sp>
       <p:sp>
         <p:nvSpPr>
-          <p:cNvPr id="17" name="Shape 15"/>
+          <p:cNvPr id="18" name="Shape 16"/>
           <p:cNvSpPr/>
           <p:nvPr/>
         </p:nvSpPr>
@@ -16929,7 +16979,7 @@
       </p:sp>
       <p:sp>
         <p:nvSpPr>
-          <p:cNvPr id="18" name="Text 16"/>
+          <p:cNvPr id="19" name="Text 17"/>
           <p:cNvSpPr/>
           <p:nvPr/>
         </p:nvSpPr>
@@ -16968,7 +17018,7 @@
       </p:sp>
       <p:sp>
         <p:nvSpPr>
-          <p:cNvPr id="19" name="Text 17"/>
+          <p:cNvPr id="20" name="Text 18"/>
           <p:cNvSpPr/>
           <p:nvPr/>
         </p:nvSpPr>
@@ -16994,7 +17044,7 @@
               <a:buNone/>
             </a:pPr>
             <a:r>
-              <a:rPr lang="en-US" sz="1150" dirty="0">
+              <a:rPr lang="en-US" sz="1150" b="1" dirty="0">
                 <a:solidFill>
                   <a:srgbClr val="1F1F1F"/>
                 </a:solidFill>
@@ -17010,7 +17060,7 @@
       </p:sp>
       <p:sp>
         <p:nvSpPr>
-          <p:cNvPr id="20" name="Text 18"/>
+          <p:cNvPr id="21" name="Text 19"/>
           <p:cNvSpPr/>
           <p:nvPr/>
         </p:nvSpPr>
@@ -17049,7 +17099,7 @@
       </p:sp>
       <p:sp>
         <p:nvSpPr>
-          <p:cNvPr id="21" name="Text 19"/>
+          <p:cNvPr id="22" name="Text 20"/>
           <p:cNvSpPr/>
           <p:nvPr/>
         </p:nvSpPr>
@@ -17091,7 +17141,7 @@
       </p:sp>
       <p:sp>
         <p:nvSpPr>
-          <p:cNvPr id="22" name="Shape 20"/>
+          <p:cNvPr id="23" name="Shape 21"/>
           <p:cNvSpPr/>
           <p:nvPr/>
         </p:nvSpPr>
@@ -17116,7 +17166,7 @@
       </p:sp>
       <p:sp>
         <p:nvSpPr>
-          <p:cNvPr id="23" name="Shape 21"/>
+          <p:cNvPr id="24" name="Shape 22"/>
           <p:cNvSpPr/>
           <p:nvPr/>
         </p:nvSpPr>
@@ -17141,7 +17191,7 @@
       </p:sp>
       <p:sp>
         <p:nvSpPr>
-          <p:cNvPr id="24" name="Text 22"/>
+          <p:cNvPr id="25" name="Text 23"/>
           <p:cNvSpPr/>
           <p:nvPr/>
         </p:nvSpPr>
@@ -17180,7 +17230,7 @@
       </p:sp>
       <p:sp>
         <p:nvSpPr>
-          <p:cNvPr id="25" name="Text 23"/>
+          <p:cNvPr id="26" name="Text 24"/>
           <p:cNvSpPr/>
           <p:nvPr/>
         </p:nvSpPr>
@@ -17206,7 +17256,7 @@
               <a:buNone/>
             </a:pPr>
             <a:r>
-              <a:rPr lang="en-US" sz="1150" dirty="0">
+              <a:rPr lang="en-US" sz="1150" b="1" dirty="0">
                 <a:solidFill>
                   <a:srgbClr val="1F1F1F"/>
                 </a:solidFill>
@@ -17222,7 +17272,7 @@
       </p:sp>
       <p:sp>
         <p:nvSpPr>
-          <p:cNvPr id="26" name="Text 24"/>
+          <p:cNvPr id="27" name="Text 25"/>
           <p:cNvSpPr/>
           <p:nvPr/>
         </p:nvSpPr>
@@ -17261,7 +17311,7 @@
       </p:sp>
       <p:sp>
         <p:nvSpPr>
-          <p:cNvPr id="27" name="Text 25"/>
+          <p:cNvPr id="28" name="Text 26"/>
           <p:cNvSpPr/>
           <p:nvPr/>
         </p:nvSpPr>
@@ -17303,7 +17353,7 @@
       </p:sp>
       <p:sp>
         <p:nvSpPr>
-          <p:cNvPr id="28" name="Shape 26"/>
+          <p:cNvPr id="29" name="Shape 27"/>
           <p:cNvSpPr/>
           <p:nvPr/>
         </p:nvSpPr>
@@ -17328,7 +17378,7 @@
       </p:sp>
       <p:sp>
         <p:nvSpPr>
-          <p:cNvPr id="29" name="Shape 27"/>
+          <p:cNvPr id="30" name="Shape 28"/>
           <p:cNvSpPr/>
           <p:nvPr/>
         </p:nvSpPr>
@@ -17353,7 +17403,7 @@
       </p:sp>
       <p:sp>
         <p:nvSpPr>
-          <p:cNvPr id="30" name="Text 28"/>
+          <p:cNvPr id="31" name="Text 29"/>
           <p:cNvSpPr/>
           <p:nvPr/>
         </p:nvSpPr>
@@ -17392,7 +17442,7 @@
       </p:sp>
       <p:sp>
         <p:nvSpPr>
-          <p:cNvPr id="31" name="Text 29"/>
+          <p:cNvPr id="32" name="Text 30"/>
           <p:cNvSpPr/>
           <p:nvPr/>
         </p:nvSpPr>
@@ -17418,7 +17468,7 @@
               <a:buNone/>
             </a:pPr>
             <a:r>
-              <a:rPr lang="en-US" sz="1150" dirty="0">
+              <a:rPr lang="en-US" sz="1150" b="1" dirty="0">
                 <a:solidFill>
                   <a:srgbClr val="1F1F1F"/>
                 </a:solidFill>
@@ -17434,7 +17484,7 @@
       </p:sp>
       <p:sp>
         <p:nvSpPr>
-          <p:cNvPr id="32" name="Text 30"/>
+          <p:cNvPr id="33" name="Text 31"/>
           <p:cNvSpPr/>
           <p:nvPr/>
         </p:nvSpPr>
@@ -17473,7 +17523,7 @@
       </p:sp>
       <p:sp>
         <p:nvSpPr>
-          <p:cNvPr id="33" name="Text 31"/>
+          <p:cNvPr id="34" name="Text 32"/>
           <p:cNvSpPr/>
           <p:nvPr/>
         </p:nvSpPr>
@@ -17515,7 +17565,7 @@
       </p:sp>
       <p:sp>
         <p:nvSpPr>
-          <p:cNvPr id="34" name="Shape 32"/>
+          <p:cNvPr id="35" name="Shape 33"/>
           <p:cNvSpPr/>
           <p:nvPr/>
         </p:nvSpPr>
@@ -17540,7 +17590,7 @@
       </p:sp>
       <p:sp>
         <p:nvSpPr>
-          <p:cNvPr id="35" name="Text 33"/>
+          <p:cNvPr id="36" name="Text 34"/>
           <p:cNvSpPr/>
           <p:nvPr/>
         </p:nvSpPr>
@@ -17579,7 +17629,7 @@
       </p:sp>
       <p:sp>
         <p:nvSpPr>
-          <p:cNvPr id="36" name="Text 34"/>
+          <p:cNvPr id="37" name="Text 35"/>
           <p:cNvSpPr/>
           <p:nvPr/>
         </p:nvSpPr>
